--- a/public/fun/pack/pptx/birthdaypro/돌잔치프리미엄_15_첫번째이야기중심_에메랄드브라스.pptx
+++ b/public/fun/pack/pptx/birthdaypro/돌잔치프리미엄_15_첫번째이야기중심_에메랄드브라스.pptx
@@ -112,12 +112,12 @@
   <p:extLst>
     <p:ext uri="{521415D9-36F7-43E2-AB2F-B90AF26B5E84}">
       <p14:sectionLst xmlns:p14="http://schemas.microsoft.com/office/powerpoint/2010/main">
-        <p14:section name="시작" id="{23B63352-29A0-4DE9-8159-AB2959C17087}">
+        <p14:section name="시작" id="{32341096-AD05-4AB5-AE45-E363F350650B}">
           <p14:sldIdLst>
             <p14:sldId id="256"/>
           </p14:sldIdLst>
         </p14:section>
-        <p14:section name="본문" id="{6EE74C15-88D2-47B0-A7B9-8AE0CE3C2E52}">
+        <p14:section name="본문" id="{A5A92398-3B74-4856-B080-56BECD9BBFCF}">
           <p14:sldIdLst>
             <p14:sldId id="257"/>
             <p14:sldId id="258"/>
@@ -125,7 +125,7 @@
             <p14:sldId id="260"/>
           </p14:sldIdLst>
         </p14:section>
-        <p14:section name="마무리" id="{B923475A-5504-4A8D-B98D-AA6004B0B07A}">
+        <p14:section name="마무리" id="{00D13D5E-53AD-4E2E-A2FE-73BF1B2184F9}">
           <p14:sldIdLst>
             <p14:sldId id="261"/>
           </p14:sldIdLst>
@@ -1458,7 +1458,7 @@
             </a:lvl1pPr>
           </a:lstStyle>
           <a:p>
-            <a:fld id="{F7DB1D6B-B1B0-4C45-BA72-C658ACD9EBC8}" type="slidenum">
+            <a:fld id="{9E41323A-C5AA-43BA-A35D-FD0F0A588BFC}" type="slidenum">
               <a:rPr lang="en-US"/>
               <a:t>‹#›</a:t>
             </a:fld>
@@ -2456,7 +2456,7 @@
             </a:lvl1pPr>
           </a:lstStyle>
           <a:p>
-            <a:fld id="{63C9F035-F1D8-47F6-A9DA-075B48357F84}" type="slidenum">
+            <a:fld id="{831B618F-E4BA-463F-ADF1-89385DF27540}" type="slidenum">
               <a:rPr lang="en-US"/>
               <a:t>‹#›</a:t>
             </a:fld>
@@ -3463,7 +3463,7 @@
             </a:lvl1pPr>
           </a:lstStyle>
           <a:p>
-            <a:fld id="{7F05369B-51FC-4936-B42C-6CFDABA30F7F}" type="slidenum">
+            <a:fld id="{44431BE9-05F2-4529-8272-C800F0CEF338}" type="slidenum">
               <a:rPr lang="en-US"/>
               <a:t>‹#›</a:t>
             </a:fld>
@@ -4626,7 +4626,7 @@
           <a:p>
             <a:r>
               <a:rPr lang="ko-KR"/>
-              <a:t>아기 이름 · 0000. 00. 00</a:t>
+              <a:t>아기 이름 · 날짜 입력</a:t>
             </a:r>
           </a:p>
           <a:p>
@@ -4786,7 +4786,7 @@
           <a:bodyPr/>
           <a:lstStyle/>
           <a:p>
-            <a:fld id="{A2660950-0449-44DF-80EC-BD7BB08AE021}" type="slidenum">
+            <a:fld id="{A81A889D-BE24-4520-939F-0B401758D7C6}" type="slidenum">
               <a:rPr lang="en-US"/>
               <a:t>‹#›</a:t>
             </a:fld>
@@ -5386,7 +5386,7 @@
           <a:bodyPr/>
           <a:lstStyle/>
           <a:p>
-            <a:fld id="{9F6D6502-331D-472A-A829-D0AE8437391B}" type="slidenum">
+            <a:fld id="{31A993E7-6347-40D0-BE94-273A112DF573}" type="slidenum">
               <a:rPr lang="en-US"/>
               <a:t>‹#›</a:t>
             </a:fld>
@@ -6361,7 +6361,7 @@
           <a:bodyPr/>
           <a:lstStyle/>
           <a:p>
-            <a:fld id="{582B0043-7E84-48D8-A63C-7BE67E34A18A}" type="slidenum">
+            <a:fld id="{551B1A06-A3BC-42C9-8071-2851C9CAEBB1}" type="slidenum">
               <a:rPr lang="en-US"/>
               <a:t>‹#›</a:t>
             </a:fld>
@@ -8083,7 +8083,7 @@
           <a:bodyPr/>
           <a:lstStyle/>
           <a:p>
-            <a:fld id="{49E2661B-53ED-4E47-B535-3009E4324C15}" type="slidenum">
+            <a:fld id="{94DB37F5-001D-4063-B8A9-0C38D891E8E3}" type="slidenum">
               <a:rPr lang="en-US"/>
               <a:t>‹#›</a:t>
             </a:fld>
